--- a/OOP-IM-WRH/答辩PPT_魏荣赫_55250124.pptx
+++ b/OOP-IM-WRH/答辩PPT_魏荣赫_55250124.pptx
@@ -867,7 +867,7 @@
           <a:lstStyle/>
           <a:p>
             <a:r>
-              <a:t>这些是实际运行输出。可以看到：共享ID、独立ID与绑定、一次登录全部在线、共同好友、QQ推荐好友、QQ群与微信群在申请/邀请/踢人/子群上的差异，全部符合题目要求。</a:t>
+              <a:t>这些是实际运行输出。可以看到：共享ID、独立ID与绑定、一次登录全部在线、共同好友、跨服务推荐好友、QQ群与微信群在申请/邀请/踢人/子群上的差异，全部符合题目要求。</a:t>
             </a:r>
           </a:p>
         </p:txBody>
@@ -5609,7 +5609,7 @@
                 <a:ea typeface="微软雅黑"/>
                 <a:cs typeface="微软雅黑"/>
               </a:rPr>
-              <a:t>读回后 8 个用户、5 个群与保存前完全一致。</a:t>
+              <a:t>首次自动演示后为 8 个用户、13 个群，读回后完全一致。</a:t>
             </a:r>
           </a:p>
         </p:txBody>
@@ -5650,7 +5650,7 @@
                 <a:ea typeface="微软雅黑"/>
                 <a:cs typeface="微软雅黑"/>
               </a:rPr>
-              <a:t>PlatformWRH::PlatformWRH(const string&amp; f) {</a:t>
+              <a:t>PlatformWRH::PlatformWRH(const string&amp; f, bool autoSave)</a:t>
             </a:r>
           </a:p>
           <a:p>
@@ -5668,7 +5668,7 @@
                 <a:ea typeface="微软雅黑"/>
                 <a:cs typeface="微软雅黑"/>
               </a:rPr>
-              <a:t>    if (!load()) buildDemo();   // 读入 or 固化数据</a:t>
+              <a:t>    : file_(f), tempNo_(2000), autoSave_(autoSave) {</a:t>
             </a:r>
           </a:p>
           <a:p>
@@ -5686,7 +5686,7 @@
                 <a:ea typeface="微软雅黑"/>
                 <a:cs typeface="微软雅黑"/>
               </a:rPr>
-              <a:t>}</a:t>
+              <a:t>    if (!load()) buildDemo();   // 读入 or 固化数据</a:t>
             </a:r>
           </a:p>
           <a:p>
@@ -5704,7 +5704,7 @@
                 <a:ea typeface="微软雅黑"/>
                 <a:cs typeface="微软雅黑"/>
               </a:rPr>
-              <a:t>PlatformWRH::~PlatformWRH() {</a:t>
+              <a:t>}</a:t>
             </a:r>
           </a:p>
           <a:p>
@@ -5722,7 +5722,43 @@
                 <a:ea typeface="微软雅黑"/>
                 <a:cs typeface="微软雅黑"/>
               </a:rPr>
-              <a:t>    save();                     // 析构写回文件</a:t>
+              <a:t>PlatformWRH::~PlatformWRH() {</a:t>
+            </a:r>
+          </a:p>
+          <a:p>
+            <a:pPr algn="l">
+              <a:spcAft>
+                <a:spcPts val="400"/>
+              </a:spcAft>
+            </a:pPr>
+            <a:r>
+              <a:rPr sz="1400" b="0">
+                <a:solidFill>
+                  <a:srgbClr val="1F3864"/>
+                </a:solidFill>
+                <a:latin typeface="Consolas"/>
+                <a:ea typeface="微软雅黑"/>
+                <a:cs typeface="微软雅黑"/>
+              </a:rPr>
+              <a:t>    if (autoSave_) save();      // 析构写回文件</a:t>
+            </a:r>
+          </a:p>
+          <a:p>
+            <a:pPr algn="l">
+              <a:spcAft>
+                <a:spcPts val="400"/>
+              </a:spcAft>
+            </a:pPr>
+            <a:r>
+              <a:rPr sz="1400" b="0">
+                <a:solidFill>
+                  <a:srgbClr val="1F3864"/>
+                </a:solidFill>
+                <a:latin typeface="Consolas"/>
+                <a:ea typeface="微软雅黑"/>
+                <a:cs typeface="微软雅黑"/>
+              </a:rPr>
+              <a:t>    clearAll();</a:t>
             </a:r>
           </a:p>
           <a:p>
@@ -6951,7 +6987,7 @@
                 <a:ea typeface="微软雅黑"/>
                 <a:cs typeface="微软雅黑"/>
               </a:rPr>
-              <a:t>[绑定] 微信号 wx10001 已绑定QQ 10001</a:t>
+              <a:t>[绑定] 微信号 wx10007 已绑定QQ 10007</a:t>
             </a:r>
           </a:p>
           <a:p>
@@ -6969,7 +7005,7 @@
                 <a:ea typeface="微软雅黑"/>
                 <a:cs typeface="微软雅黑"/>
               </a:rPr>
-              <a:t>[登录] 小腾 在 [QQ] 登录，其开通的其它服务(微博、微信) 已自动登录。</a:t>
+              <a:t>[登录] 小腾 在 [QQ] 登录，已开通的 QQ、微博、微信 全部自动登录。</a:t>
             </a:r>
           </a:p>
           <a:p>
@@ -7005,7 +7041,7 @@
                 <a:ea typeface="微软雅黑"/>
                 <a:cs typeface="微软雅黑"/>
               </a:rPr>
-              <a:t>[微信加QQ推荐好友] 推荐 阿豪(wx10004) → 添加为微信好友成功</a:t>
+              <a:t>[推荐] 已把 阿豪(wx10004) 添加为微信好友</a:t>
             </a:r>
           </a:p>
           <a:p>
@@ -8746,7 +8782,7 @@
                           <a:ea typeface="微软雅黑"/>
                           <a:cs typeface="微软雅黑"/>
                         </a:rPr>
-                        <a:t>增/删/改/查；微X间共同好友；微信加QQ推荐好友</a:t>
+                        <a:t>增/删/改/查；微X间共同好友；跨服务推荐好友</a:t>
                       </a:r>
                     </a:p>
                   </a:txBody>
